--- a/Aegis_Codex_Pitch_Deck.pptx
+++ b/Aegis_Codex_Pitch_Deck.pptx
@@ -310,7 +310,7 @@
           <a:p>
             <a:fld id="{5BCAD085-E8A6-8845-BD4E-CB4CCA059FC4}" type="datetimeFigureOut">
               <a:rPr lang="en-US" smtClean="0"/>
-              <a:t>6/2/2026</a:t>
+              <a:t>6/14/2026</a:t>
             </a:fld>
             <a:endParaRPr lang="en-US"/>
           </a:p>
@@ -478,7 +478,7 @@
           <a:p>
             <a:fld id="{5BCAD085-E8A6-8845-BD4E-CB4CCA059FC4}" type="datetimeFigureOut">
               <a:rPr lang="en-US" smtClean="0"/>
-              <a:t>6/2/2026</a:t>
+              <a:t>6/14/2026</a:t>
             </a:fld>
             <a:endParaRPr lang="en-US"/>
           </a:p>
@@ -656,7 +656,7 @@
           <a:p>
             <a:fld id="{5BCAD085-E8A6-8845-BD4E-CB4CCA059FC4}" type="datetimeFigureOut">
               <a:rPr lang="en-US" smtClean="0"/>
-              <a:t>6/2/2026</a:t>
+              <a:t>6/14/2026</a:t>
             </a:fld>
             <a:endParaRPr lang="en-US"/>
           </a:p>
@@ -824,7 +824,7 @@
           <a:p>
             <a:fld id="{5BCAD085-E8A6-8845-BD4E-CB4CCA059FC4}" type="datetimeFigureOut">
               <a:rPr lang="en-US" smtClean="0"/>
-              <a:t>6/2/2026</a:t>
+              <a:t>6/14/2026</a:t>
             </a:fld>
             <a:endParaRPr lang="en-US"/>
           </a:p>
@@ -1069,7 +1069,7 @@
           <a:p>
             <a:fld id="{5BCAD085-E8A6-8845-BD4E-CB4CCA059FC4}" type="datetimeFigureOut">
               <a:rPr lang="en-US" smtClean="0"/>
-              <a:t>6/2/2026</a:t>
+              <a:t>6/14/2026</a:t>
             </a:fld>
             <a:endParaRPr lang="en-US"/>
           </a:p>
@@ -1354,7 +1354,7 @@
           <a:p>
             <a:fld id="{5BCAD085-E8A6-8845-BD4E-CB4CCA059FC4}" type="datetimeFigureOut">
               <a:rPr lang="en-US" smtClean="0"/>
-              <a:t>6/2/2026</a:t>
+              <a:t>6/14/2026</a:t>
             </a:fld>
             <a:endParaRPr lang="en-US"/>
           </a:p>
@@ -1773,7 +1773,7 @@
           <a:p>
             <a:fld id="{5BCAD085-E8A6-8845-BD4E-CB4CCA059FC4}" type="datetimeFigureOut">
               <a:rPr lang="en-US" smtClean="0"/>
-              <a:t>6/2/2026</a:t>
+              <a:t>6/14/2026</a:t>
             </a:fld>
             <a:endParaRPr lang="en-US"/>
           </a:p>
@@ -1890,7 +1890,7 @@
           <a:p>
             <a:fld id="{5BCAD085-E8A6-8845-BD4E-CB4CCA059FC4}" type="datetimeFigureOut">
               <a:rPr lang="en-US" smtClean="0"/>
-              <a:t>6/2/2026</a:t>
+              <a:t>6/14/2026</a:t>
             </a:fld>
             <a:endParaRPr lang="en-US"/>
           </a:p>
@@ -1985,7 +1985,7 @@
           <a:p>
             <a:fld id="{5BCAD085-E8A6-8845-BD4E-CB4CCA059FC4}" type="datetimeFigureOut">
               <a:rPr lang="en-US" smtClean="0"/>
-              <a:t>6/2/2026</a:t>
+              <a:t>6/14/2026</a:t>
             </a:fld>
             <a:endParaRPr lang="en-US"/>
           </a:p>
@@ -2260,7 +2260,7 @@
           <a:p>
             <a:fld id="{5BCAD085-E8A6-8845-BD4E-CB4CCA059FC4}" type="datetimeFigureOut">
               <a:rPr lang="en-US" smtClean="0"/>
-              <a:t>6/2/2026</a:t>
+              <a:t>6/14/2026</a:t>
             </a:fld>
             <a:endParaRPr lang="en-US"/>
           </a:p>
@@ -2512,7 +2512,7 @@
           <a:p>
             <a:fld id="{5BCAD085-E8A6-8845-BD4E-CB4CCA059FC4}" type="datetimeFigureOut">
               <a:rPr lang="en-US" smtClean="0"/>
-              <a:t>6/2/2026</a:t>
+              <a:t>6/14/2026</a:t>
             </a:fld>
             <a:endParaRPr lang="en-US"/>
           </a:p>
@@ -2723,7 +2723,7 @@
           <a:p>
             <a:fld id="{5BCAD085-E8A6-8845-BD4E-CB4CCA059FC4}" type="datetimeFigureOut">
               <a:rPr lang="en-US" smtClean="0"/>
-              <a:t>6/2/2026</a:t>
+              <a:t>6/14/2026</a:t>
             </a:fld>
             <a:endParaRPr lang="en-US"/>
           </a:p>
@@ -3106,7 +3106,7 @@
         </p:nvSpPr>
         <p:spPr>
           <a:xfrm>
-            <a:off x="0" y="0"/>
+            <a:off x="7951" y="0"/>
             <a:ext cx="12192000" cy="6858000"/>
           </a:xfrm>
           <a:prstGeom prst="rect">
@@ -3291,145 +3291,6 @@
       </p:sp>
       <p:grpSp>
         <p:nvGrpSpPr>
-          <p:cNvPr id="13" name="Group 13"/>
-          <p:cNvGrpSpPr/>
-          <p:nvPr/>
-        </p:nvGrpSpPr>
-        <p:grpSpPr>
-          <a:xfrm>
-            <a:off x="857250" y="762000"/>
-            <a:ext cx="3524250" cy="304800"/>
-            <a:chOff x="857250" y="762000"/>
-            <a:chExt cx="3524250" cy="304800"/>
-          </a:xfrm>
-        </p:grpSpPr>
-        <p:sp>
-          <p:nvSpPr>
-            <p:cNvPr id="9" name="Rectangle 9"/>
-            <p:cNvSpPr/>
-            <p:nvPr/>
-          </p:nvSpPr>
-          <p:spPr>
-            <a:xfrm>
-              <a:off x="857250" y="762000"/>
-              <a:ext cx="2095500" cy="304800"/>
-            </a:xfrm>
-            <a:prstGeom prst="rect">
-              <a:avLst/>
-            </a:prstGeom>
-            <a:solidFill>
-              <a:srgbClr val="1E4DBC"/>
-            </a:solidFill>
-            <a:ln>
-              <a:noFill/>
-            </a:ln>
-          </p:spPr>
-        </p:sp>
-        <p:sp>
-          <p:nvSpPr>
-            <p:cNvPr id="10" name="TextBox 10"/>
-            <p:cNvSpPr txBox="1"/>
-            <p:nvPr/>
-          </p:nvSpPr>
-          <p:spPr>
-            <a:xfrm>
-              <a:off x="998858" y="864870"/>
-              <a:ext cx="1812284" cy="182880"/>
-            </a:xfrm>
-            <a:prstGeom prst="rect">
-              <a:avLst/>
-            </a:prstGeom>
-            <a:noFill/>
-            <a:ln>
-              <a:noFill/>
-            </a:ln>
-          </p:spPr>
-          <p:txBody>
-            <a:bodyPr wrap="none" lIns="0" tIns="0" rIns="0" bIns="0" anchor="t" anchorCtr="0">
-              <a:spAutoFit/>
-            </a:bodyPr>
-            <a:lstStyle/>
-            <a:p>
-              <a:pPr algn="ctr"/>
-              <a:r>
-                <a:rPr lang="zh-CN" sz="900" b="1" dirty="0">
-                  <a:solidFill>
-                    <a:srgbClr val="F5EFE0"/>
-                  </a:solidFill>
-                  <a:latin typeface="Consolas"/>
-                  <a:ea typeface="Microsoft YaHei"/>
-                  <a:cs typeface="Consolas"/>
-                </a:rPr>
-                <a:t>OPENAI × OUTSKILL HACKATHON</a:t>
-              </a:r>
-            </a:p>
-          </p:txBody>
-        </p:sp>
-        <p:sp>
-          <p:nvSpPr>
-            <p:cNvPr id="11" name="Rectangle 11"/>
-            <p:cNvSpPr/>
-            <p:nvPr/>
-          </p:nvSpPr>
-          <p:spPr>
-            <a:xfrm>
-              <a:off x="3048000" y="762000"/>
-              <a:ext cx="1333500" cy="304800"/>
-            </a:xfrm>
-            <a:prstGeom prst="rect">
-              <a:avLst/>
-            </a:prstGeom>
-            <a:solidFill>
-              <a:srgbClr val="FF5C8A"/>
-            </a:solidFill>
-            <a:ln>
-              <a:noFill/>
-            </a:ln>
-          </p:spPr>
-        </p:sp>
-        <p:sp>
-          <p:nvSpPr>
-            <p:cNvPr id="12" name="TextBox 12"/>
-            <p:cNvSpPr txBox="1"/>
-            <p:nvPr/>
-          </p:nvSpPr>
-          <p:spPr>
-            <a:xfrm>
-              <a:off x="3259114" y="864870"/>
-              <a:ext cx="911271" cy="182880"/>
-            </a:xfrm>
-            <a:prstGeom prst="rect">
-              <a:avLst/>
-            </a:prstGeom>
-            <a:noFill/>
-            <a:ln>
-              <a:noFill/>
-            </a:ln>
-          </p:spPr>
-          <p:txBody>
-            <a:bodyPr wrap="none" lIns="0" tIns="0" rIns="0" bIns="0" anchor="t" anchorCtr="0">
-              <a:spAutoFit/>
-            </a:bodyPr>
-            <a:lstStyle/>
-            <a:p>
-              <a:pPr algn="ctr"/>
-              <a:r>
-                <a:rPr lang="zh-CN" sz="900" b="1" dirty="0">
-                  <a:solidFill>
-                    <a:srgbClr val="1A1A1A"/>
-                  </a:solidFill>
-                  <a:latin typeface="Consolas"/>
-                  <a:ea typeface="Microsoft YaHei"/>
-                  <a:cs typeface="Consolas"/>
-                </a:rPr>
-                <a:t>SWARM: ACTIVE</a:t>
-              </a:r>
-            </a:p>
-          </p:txBody>
-        </p:sp>
-      </p:grpSp>
-      <p:grpSp>
-        <p:nvGrpSpPr>
           <p:cNvPr id="16" name="Group 16"/>
           <p:cNvGrpSpPr/>
           <p:nvPr/>
@@ -3437,9 +3298,9 @@
         <p:grpSpPr>
           <a:xfrm>
             <a:off x="752475" y="1776412"/>
-            <a:ext cx="6573441" cy="1714500"/>
+            <a:ext cx="2634965" cy="1307678"/>
             <a:chOff x="752475" y="1776412"/>
-            <a:chExt cx="6573441" cy="1714500"/>
+            <a:chExt cx="2634965" cy="1307678"/>
           </a:xfrm>
         </p:grpSpPr>
         <p:sp>
@@ -3451,7 +3312,7 @@
           <p:spPr>
             <a:xfrm>
               <a:off x="790575" y="1814512"/>
-              <a:ext cx="6535341" cy="1676400"/>
+              <a:ext cx="2596865" cy="1269578"/>
             </a:xfrm>
             <a:prstGeom prst="rect">
               <a:avLst/>
@@ -3477,7 +3338,7 @@
                   <a:ea typeface="Microsoft YaHei"/>
                   <a:cs typeface="Impact"/>
                 </a:rPr>
-                <a:t>AEGIS CODEX</a:t>
+                <a:t>AEGIS </a:t>
               </a:r>
             </a:p>
           </p:txBody>
@@ -3491,7 +3352,7 @@
           <p:spPr>
             <a:xfrm>
               <a:off x="752475" y="1776412"/>
-              <a:ext cx="6535341" cy="1676400"/>
+              <a:ext cx="2596865" cy="1269578"/>
             </a:xfrm>
             <a:prstGeom prst="rect">
               <a:avLst/>
@@ -3517,7 +3378,7 @@
                   <a:ea typeface="Microsoft YaHei"/>
                   <a:cs typeface="Impact"/>
                 </a:rPr>
-                <a:t>AEGIS CODEX</a:t>
+                <a:t>AEGIS </a:t>
               </a:r>
             </a:p>
           </p:txBody>
@@ -4501,13 +4362,13 @@
   <p:clrMapOvr>
     <a:masterClrMapping/>
   </p:clrMapOvr>
-  <mc:AlternateContent xmlns:mc="http://schemas.openxmlformats.org/markup-compatibility/2006">
-    <mc:Choice xmlns:p14="http://schemas.microsoft.com/office/powerpoint/2010/main" Requires="p14">
+  <mc:AlternateContent xmlns:mc="http://schemas.openxmlformats.org/markup-compatibility/2006" xmlns:p14="http://schemas.microsoft.com/office/powerpoint/2010/main">
+    <mc:Choice Requires="p14">
       <p:transition p14:dur="400">
         <p:fade/>
       </p:transition>
     </mc:Choice>
-    <mc:Fallback>
+    <mc:Fallback xmlns="">
       <p:transition>
         <p:fade/>
       </p:transition>
@@ -4550,7 +4411,7 @@
                                           </p:stCondLst>
                                         </p:cTn>
                                         <p:tgtEl>
-                                          <p:spTgt spid="13"/>
+                                          <p:spTgt spid="16"/>
                                         </p:tgtEl>
                                         <p:attrNameLst>
                                           <p:attrName>style.visibility</p:attrName>
@@ -4564,7 +4425,7 @@
                                       <p:cBhvr>
                                         <p:cTn id="7" dur="400"/>
                                         <p:tgtEl>
-                                          <p:spTgt spid="13"/>
+                                          <p:spTgt spid="16"/>
                                         </p:tgtEl>
                                       </p:cBhvr>
                                     </p:animEffect>
@@ -4577,7 +4438,7 @@
                         <p:par>
                           <p:cTn id="8" fill="hold">
                             <p:stCondLst>
-                              <p:cond delay="900"/>
+                              <p:cond delay="400"/>
                             </p:stCondLst>
                             <p:childTnLst>
                               <p:par>
@@ -4589,50 +4450,6 @@
                                     <p:set>
                                       <p:cBhvr>
                                         <p:cTn id="10" dur="1" fill="hold">
-                                          <p:stCondLst>
-                                            <p:cond delay="0"/>
-                                          </p:stCondLst>
-                                        </p:cTn>
-                                        <p:tgtEl>
-                                          <p:spTgt spid="16"/>
-                                        </p:tgtEl>
-                                        <p:attrNameLst>
-                                          <p:attrName>style.visibility</p:attrName>
-                                        </p:attrNameLst>
-                                      </p:cBhvr>
-                                      <p:to>
-                                        <p:strVal val="visible"/>
-                                      </p:to>
-                                    </p:set>
-                                    <p:animEffect transition="in" filter="fade">
-                                      <p:cBhvr>
-                                        <p:cTn id="11" dur="400"/>
-                                        <p:tgtEl>
-                                          <p:spTgt spid="16"/>
-                                        </p:tgtEl>
-                                      </p:cBhvr>
-                                    </p:animEffect>
-                                  </p:childTnLst>
-                                </p:cTn>
-                              </p:par>
-                            </p:childTnLst>
-                          </p:cTn>
-                        </p:par>
-                        <p:par>
-                          <p:cTn id="12" fill="hold">
-                            <p:stCondLst>
-                              <p:cond delay="1800"/>
-                            </p:stCondLst>
-                            <p:childTnLst>
-                              <p:par>
-                                <p:cTn id="13" presetID="10" presetClass="entr" presetSubtype="0" fill="hold" nodeType="afterEffect">
-                                  <p:stCondLst>
-                                    <p:cond delay="0"/>
-                                  </p:stCondLst>
-                                  <p:childTnLst>
-                                    <p:set>
-                                      <p:cBhvr>
-                                        <p:cTn id="14" dur="1" fill="hold">
                                           <p:stCondLst>
                                             <p:cond delay="0"/>
                                           </p:stCondLst>
@@ -4650,7 +4467,7 @@
                                     </p:set>
                                     <p:animEffect transition="in" filter="fade">
                                       <p:cBhvr>
-                                        <p:cTn id="15" dur="400"/>
+                                        <p:cTn id="11" dur="400"/>
                                         <p:tgtEl>
                                           <p:spTgt spid="19"/>
                                         </p:tgtEl>
@@ -4663,20 +4480,20 @@
                           </p:cTn>
                         </p:par>
                         <p:par>
-                          <p:cTn id="16" fill="hold">
+                          <p:cTn id="12" fill="hold">
                             <p:stCondLst>
-                              <p:cond delay="2700"/>
+                              <p:cond delay="800"/>
                             </p:stCondLst>
                             <p:childTnLst>
                               <p:par>
-                                <p:cTn id="17" presetID="23" presetClass="entr" presetSubtype="0" fill="hold" nodeType="afterEffect">
+                                <p:cTn id="13" presetID="23" presetClass="entr" presetSubtype="0" fill="hold" nodeType="afterEffect">
                                   <p:stCondLst>
                                     <p:cond delay="0"/>
                                   </p:stCondLst>
                                   <p:childTnLst>
                                     <p:set>
                                       <p:cBhvr>
-                                        <p:cTn id="18" dur="1" fill="hold">
+                                        <p:cTn id="14" dur="1" fill="hold">
                                           <p:stCondLst>
                                             <p:cond delay="0"/>
                                           </p:stCondLst>
@@ -4694,7 +4511,7 @@
                                     </p:set>
                                     <p:animEffect transition="in" filter="image">
                                       <p:cBhvr>
-                                        <p:cTn id="19" dur="400"/>
+                                        <p:cTn id="15" dur="400"/>
                                         <p:tgtEl>
                                           <p:spTgt spid="35"/>
                                         </p:tgtEl>
@@ -4707,20 +4524,20 @@
                           </p:cTn>
                         </p:par>
                         <p:par>
-                          <p:cTn id="20" fill="hold">
+                          <p:cTn id="16" fill="hold">
                             <p:stCondLst>
-                              <p:cond delay="3600"/>
+                              <p:cond delay="1200"/>
                             </p:stCondLst>
                             <p:childTnLst>
                               <p:par>
-                                <p:cTn id="21" presetID="10" presetClass="entr" presetSubtype="0" fill="hold" nodeType="afterEffect">
+                                <p:cTn id="17" presetID="10" presetClass="entr" presetSubtype="0" fill="hold" nodeType="afterEffect">
                                   <p:stCondLst>
                                     <p:cond delay="0"/>
                                   </p:stCondLst>
                                   <p:childTnLst>
                                     <p:set>
                                       <p:cBhvr>
-                                        <p:cTn id="22" dur="1" fill="hold">
+                                        <p:cTn id="18" dur="1" fill="hold">
                                           <p:stCondLst>
                                             <p:cond delay="0"/>
                                           </p:stCondLst>
@@ -4738,7 +4555,7 @@
                                     </p:set>
                                     <p:animEffect transition="in" filter="fade">
                                       <p:cBhvr>
-                                        <p:cTn id="23" dur="400"/>
+                                        <p:cTn id="19" dur="400"/>
                                         <p:tgtEl>
                                           <p:spTgt spid="42"/>
                                         </p:tgtEl>
@@ -4751,20 +4568,20 @@
                           </p:cTn>
                         </p:par>
                         <p:par>
-                          <p:cTn id="24" fill="hold">
+                          <p:cTn id="20" fill="hold">
                             <p:stCondLst>
-                              <p:cond delay="4500"/>
+                              <p:cond delay="1600"/>
                             </p:stCondLst>
                             <p:childTnLst>
                               <p:par>
-                                <p:cTn id="25" presetID="22" presetClass="entr" presetSubtype="1" fill="hold" nodeType="afterEffect">
+                                <p:cTn id="21" presetID="22" presetClass="entr" presetSubtype="1" fill="hold" nodeType="afterEffect">
                                   <p:stCondLst>
                                     <p:cond delay="0"/>
                                   </p:stCondLst>
                                   <p:childTnLst>
                                     <p:set>
                                       <p:cBhvr>
-                                        <p:cTn id="26" dur="1" fill="hold">
+                                        <p:cTn id="22" dur="1" fill="hold">
                                           <p:stCondLst>
                                             <p:cond delay="0"/>
                                           </p:stCondLst>
@@ -4782,7 +4599,7 @@
                                     </p:set>
                                     <p:animEffect transition="in" filter="wipe(left)">
                                       <p:cBhvr>
-                                        <p:cTn id="27" dur="400"/>
+                                        <p:cTn id="23" dur="400"/>
                                         <p:tgtEl>
                                           <p:spTgt spid="45"/>
                                         </p:tgtEl>
@@ -4819,7 +4636,6 @@
       </p:par>
     </p:tnLst>
     <p:bldLst>
-      <p:bldP spid="13" grpId="0"/>
       <p:bldP spid="16" grpId="0"/>
       <p:bldP spid="19" grpId="0"/>
       <p:bldP spid="35" grpId="0"/>
@@ -6297,13 +6113,13 @@
   <p:clrMapOvr>
     <a:masterClrMapping/>
   </p:clrMapOvr>
-  <mc:AlternateContent xmlns:mc="http://schemas.openxmlformats.org/markup-compatibility/2006">
-    <mc:Choice xmlns:p14="http://schemas.microsoft.com/office/powerpoint/2010/main" Requires="p14">
+  <mc:AlternateContent xmlns:mc="http://schemas.openxmlformats.org/markup-compatibility/2006" xmlns:p14="http://schemas.microsoft.com/office/powerpoint/2010/main">
+    <mc:Choice Requires="p14">
       <p:transition p14:dur="400">
         <p:fade/>
       </p:transition>
     </mc:Choice>
-    <mc:Fallback>
+    <mc:Fallback xmlns="">
       <p:transition>
         <p:fade/>
       </p:transition>
@@ -8967,13 +8783,13 @@
   <p:clrMapOvr>
     <a:masterClrMapping/>
   </p:clrMapOvr>
-  <mc:AlternateContent xmlns:mc="http://schemas.openxmlformats.org/markup-compatibility/2006">
-    <mc:Choice xmlns:p14="http://schemas.microsoft.com/office/powerpoint/2010/main" Requires="p14">
+  <mc:AlternateContent xmlns:mc="http://schemas.openxmlformats.org/markup-compatibility/2006" xmlns:p14="http://schemas.microsoft.com/office/powerpoint/2010/main">
+    <mc:Choice Requires="p14">
       <p:transition p14:dur="400">
         <p:fade/>
       </p:transition>
     </mc:Choice>
-    <mc:Fallback>
+    <mc:Fallback xmlns="">
       <p:transition>
         <p:fade/>
       </p:transition>
@@ -12618,13 +12434,13 @@
   <p:clrMapOvr>
     <a:masterClrMapping/>
   </p:clrMapOvr>
-  <mc:AlternateContent xmlns:mc="http://schemas.openxmlformats.org/markup-compatibility/2006">
-    <mc:Choice xmlns:p14="http://schemas.microsoft.com/office/powerpoint/2010/main" Requires="p14">
+  <mc:AlternateContent xmlns:mc="http://schemas.openxmlformats.org/markup-compatibility/2006" xmlns:p14="http://schemas.microsoft.com/office/powerpoint/2010/main">
+    <mc:Choice Requires="p14">
       <p:transition p14:dur="400">
         <p:fade/>
       </p:transition>
     </mc:Choice>
-    <mc:Fallback>
+    <mc:Fallback xmlns="">
       <p:transition>
         <p:fade/>
       </p:transition>
@@ -15192,13 +15008,13 @@
   <p:clrMapOvr>
     <a:masterClrMapping/>
   </p:clrMapOvr>
-  <mc:AlternateContent xmlns:mc="http://schemas.openxmlformats.org/markup-compatibility/2006">
-    <mc:Choice xmlns:p14="http://schemas.microsoft.com/office/powerpoint/2010/main" Requires="p14">
+  <mc:AlternateContent xmlns:mc="http://schemas.openxmlformats.org/markup-compatibility/2006" xmlns:p14="http://schemas.microsoft.com/office/powerpoint/2010/main">
+    <mc:Choice Requires="p14">
       <p:transition p14:dur="400">
         <p:fade/>
       </p:transition>
     </mc:Choice>
-    <mc:Fallback>
+    <mc:Fallback xmlns="">
       <p:transition>
         <p:fade/>
       </p:transition>
@@ -17384,13 +17200,13 @@
   <p:clrMapOvr>
     <a:masterClrMapping/>
   </p:clrMapOvr>
-  <mc:AlternateContent xmlns:mc="http://schemas.openxmlformats.org/markup-compatibility/2006">
-    <mc:Choice xmlns:p14="http://schemas.microsoft.com/office/powerpoint/2010/main" Requires="p14">
+  <mc:AlternateContent xmlns:mc="http://schemas.openxmlformats.org/markup-compatibility/2006" xmlns:p14="http://schemas.microsoft.com/office/powerpoint/2010/main">
+    <mc:Choice Requires="p14">
       <p:transition p14:dur="400">
         <p:fade/>
       </p:transition>
     </mc:Choice>
-    <mc:Fallback>
+    <mc:Fallback xmlns="">
       <p:transition>
         <p:fade/>
       </p:transition>
@@ -20012,13 +19828,13 @@
   <p:clrMapOvr>
     <a:masterClrMapping/>
   </p:clrMapOvr>
-  <mc:AlternateContent xmlns:mc="http://schemas.openxmlformats.org/markup-compatibility/2006">
-    <mc:Choice xmlns:p14="http://schemas.microsoft.com/office/powerpoint/2010/main" Requires="p14">
+  <mc:AlternateContent xmlns:mc="http://schemas.openxmlformats.org/markup-compatibility/2006" xmlns:p14="http://schemas.microsoft.com/office/powerpoint/2010/main">
+    <mc:Choice Requires="p14">
       <p:transition p14:dur="400">
         <p:fade/>
       </p:transition>
     </mc:Choice>
-    <mc:Fallback>
+    <mc:Fallback xmlns="">
       <p:transition>
         <p:fade/>
       </p:transition>
@@ -23257,13 +23073,13 @@
   <p:clrMapOvr>
     <a:masterClrMapping/>
   </p:clrMapOvr>
-  <mc:AlternateContent xmlns:mc="http://schemas.openxmlformats.org/markup-compatibility/2006">
-    <mc:Choice xmlns:p14="http://schemas.microsoft.com/office/powerpoint/2010/main" Requires="p14">
+  <mc:AlternateContent xmlns:mc="http://schemas.openxmlformats.org/markup-compatibility/2006" xmlns:p14="http://schemas.microsoft.com/office/powerpoint/2010/main">
+    <mc:Choice Requires="p14">
       <p:transition p14:dur="400">
         <p:fade/>
       </p:transition>
     </mc:Choice>
-    <mc:Fallback>
+    <mc:Fallback xmlns="">
       <p:transition>
         <p:fade/>
       </p:transition>
@@ -24296,13 +24112,13 @@
   <p:clrMapOvr>
     <a:masterClrMapping/>
   </p:clrMapOvr>
-  <mc:AlternateContent xmlns:mc="http://schemas.openxmlformats.org/markup-compatibility/2006">
-    <mc:Choice xmlns:p14="http://schemas.microsoft.com/office/powerpoint/2010/main" Requires="p14">
+  <mc:AlternateContent xmlns:mc="http://schemas.openxmlformats.org/markup-compatibility/2006" xmlns:p14="http://schemas.microsoft.com/office/powerpoint/2010/main">
+    <mc:Choice Requires="p14">
       <p:transition p14:dur="400">
         <p:fade/>
       </p:transition>
     </mc:Choice>
-    <mc:Fallback>
+    <mc:Fallback xmlns="">
       <p:transition>
         <p:fade/>
       </p:transition>
